--- a/dist/초5/국어/토의와논리적표현/초5_국어_토의와논리적표현_01_주장과근거_학생용.pptx
+++ b/dist/초5/국어/토의와논리적표현/초5_국어_토의와논리적표현_01_주장과근거_학생용.pptx
@@ -119,13 +119,13 @@
   <p:extLst>
     <p:ext uri="{521415D9-36F7-43E2-AB2F-B90AF26B5E84}">
       <p14:sectionLst xmlns:p14="http://schemas.microsoft.com/office/powerpoint/2010/main">
-        <p14:section name="도입" id="{112ba1df-cae7-ed70-da9e-209815bc6615}">
+        <p14:section name="도입" id="{6851cbdb-72fc-1712-3209-518ed5988752}">
           <p14:sldIdLst>
             <p14:sldId id="256"/>
             <p14:sldId id="257"/>
           </p14:sldIdLst>
         </p14:section>
-        <p14:section name="개념" id="{fc28ed78-8464-8bb1-3abf-1eef860b6eee}">
+        <p14:section name="개념" id="{2695b119-a548-322c-f2fe-a6550e4762a6}">
           <p14:sldIdLst>
             <p14:sldId id="258"/>
             <p14:sldId id="259"/>
@@ -133,25 +133,25 @@
             <p14:sldId id="261"/>
           </p14:sldIdLst>
         </p14:section>
-        <p14:section name="연습" id="{32323b8c-5e8e-cd81-482e-424a14a3eb13}">
+        <p14:section name="연습" id="{0e58ab4d-a712-c49c-4ae2-5d6447419a19}">
           <p14:sldIdLst>
             <p14:sldId id="262"/>
             <p14:sldId id="263"/>
             <p14:sldId id="264"/>
           </p14:sldIdLst>
         </p14:section>
-        <p14:section name="확인" id="{b1e58d1b-3393-c32e-936c-0c3ddb85f94d}">
+        <p14:section name="확인" id="{3b8eb02d-69c9-74ad-9013-c278aed2cfde}">
           <p14:sldIdLst>
             <p14:sldId id="265"/>
             <p14:sldId id="266"/>
           </p14:sldIdLst>
         </p14:section>
-        <p14:section name="정리" id="{38760fb6-7efb-5928-8626-417f396e8015}">
+        <p14:section name="정리" id="{8d8afc6b-37d8-e98b-e615-2f4b0f23573f}">
           <p14:sldIdLst>
             <p14:sldId id="267"/>
           </p14:sldIdLst>
         </p14:section>
-        <p14:section name="보충" id="{a3781f75-9cfe-6e19-7fc5-ae428542cbbf}">
+        <p14:section name="보충" id="{b9d3661a-0719-977d-05dd-ffeb44244d5b}">
           <p14:sldIdLst>
             <p14:sldId id="268"/>
           </p14:sldIdLst>
